--- a/docs/teslim/sunum/07-sunum.pptx
+++ b/docs/teslim/sunum/07-sunum.pptx
@@ -129,13 +129,13 @@
   <p:extLst>
     <p:ext uri="{521415D9-36F7-43E2-AB2F-B90AF26B5E84}">
       <p14:sectionLst xmlns:p14="http://schemas.microsoft.com/office/powerpoint/2010/main">
-        <p14:section name="Giriş" id="{D40F6E67-4882-745A-697B-3B977A6EAE4F}">
+        <p14:section name="Giriş" id="{4A2E5428-A46E-40EB-B989-DA3B31041646}">
           <p14:sldIdLst>
             <p14:sldId id="256"/>
             <p14:sldId id="257"/>
           </p14:sldIdLst>
         </p14:section>
-        <p14:section name="Çözüm" id="{958A4AB4-53B2-ECD2-64DC-4A5EBF88037C}">
+        <p14:section name="Çözüm" id="{12B2ACB8-1E91-36B8-54C6-C494DCCED272}">
           <p14:sldIdLst>
             <p14:sldId id="258"/>
             <p14:sldId id="259"/>
@@ -145,19 +145,19 @@
             <p14:sldId id="263"/>
           </p14:sldIdLst>
         </p14:section>
-        <p14:section name="Demo" id="{8B05F186-0127-C888-DB96-02B784DB4E86}">
+        <p14:section name="Demo" id="{32C1499C-E3E6-6A5D-BD2D-2D0ABA33C5F6}">
           <p14:sldIdLst>
             <p14:sldId id="264"/>
           </p14:sldIdLst>
         </p14:section>
-        <p14:section name="Sonuçlar" id="{127F7F09-479C-41E9-309B-8BDFD28AADA5}">
+        <p14:section name="Sonuçlar" id="{A677FB6F-1487-890E-8CDC-380550958D48}">
           <p14:sldIdLst>
             <p14:sldId id="265"/>
             <p14:sldId id="266"/>
             <p14:sldId id="267"/>
           </p14:sldIdLst>
         </p14:section>
-        <p14:section name="Ek" id="{7E4BAA04-A82D-8DF0-F385-7283C8E7991A}">
+        <p14:section name="Ek" id="{F1811340-79BE-A369-38D8-0CB8AFEE9BEF}">
           <p14:sldIdLst>
             <p14:sldId id="268"/>
             <p14:sldId id="269"/>
@@ -206,7 +206,7 @@
     </p:spTree>
     <p:extLst>
       <p:ext uri="{BB962C8B-B14F-4D97-AF65-F5344CB8AC3E}">
-        <p14:creationId xmlns:p14="http://schemas.microsoft.com/office/powerpoint/2010/main" val="344242105"/>
+        <p14:creationId xmlns:p14="http://schemas.microsoft.com/office/powerpoint/2010/main" val="3265325785"/>
       </p:ext>
     </p:extLst>
   </p:cSld>
@@ -449,7 +449,7 @@
                 <a:latin typeface="Arial" panose="020B0604020202020204" pitchFamily="34" charset="0"/>
               </a:rPr>
               <a:t>[Ardahan · 0:45]
-Dört katmanda test ettik. Brief'in kesin kuralları için hedefimiz %100: 34 senaryo ve 39 çalıştırmada kural kontrolleri %100, kısıt ihlali 0, aynı girdi 5'te 5 aynı sonucu verdi. Metin kalitesini bir dil modeli hakemi puanlıyor; bunu yalnızca yön göstergesi olarak okuyoruz. Ajan için dürüst olalım: 8 kararın hepsi denetimden geçti, ama adil A/B'de ajan 3, motor 2 kez kazandı. Bu yüzden RM iki listeyi de görüyor ve ajan isteğe bağlı.</a:t>
+Dört katmanda test ettik. Brief'in kesin kuralları için hedefimiz %100: 34 senaryo ve 39 çalıştırmada kural kontrolleri %100, kısıt ihlali 0, aynı girdi 5'te 5 aynı sonucu verdi. Metin kalitesini bir dil modeli hakemi puanlıyor; bunu yalnızca yön göstergesi olarak okuyoruz. Ajan için dürüst olalım: 8 kararın hepsi denetimden geçti. Kör A/B'de iki farklı firmanın modelini hakem yaptık; 5 sorunun 4'ünde aynı kazananı seçtiler ve ajan çoğunlukla kazandı. Ama soru sayısı az ve hakemler de dil modeli; bu yüzden RM iki listeyi de görüyor ve ajan isteğe bağlı.</a:t>
             </a:r>
           </a:p>
         </p:txBody>
@@ -4129,7 +4129,7 @@
                 <a:ea typeface="Arial" pitchFamily="34" charset="-122"/>
                 <a:cs typeface="Arial" pitchFamily="34" charset="-120"/>
               </a:rPr>
-              <a:t>3.056 pytest, 458 web testi; ağ yok, sahte model</a:t>
+              <a:t>3.078 pytest, 458 web testi; ağ yok, sahte model</a:t>
             </a:r>
             <a:endParaRPr lang="en-US" sz="1250" dirty="0"/>
           </a:p>
@@ -4520,7 +4520,7 @@
                 <a:ea typeface="Arial" pitchFamily="34" charset="-122"/>
                 <a:cs typeface="Arial" pitchFamily="34" charset="-120"/>
               </a:rPr>
-              <a:t>3 – 2 – 1</a:t>
+              <a:t>4 / 5</a:t>
             </a:r>
             <a:endParaRPr lang="en-US" sz="2000" dirty="0"/>
           </a:p>
@@ -4559,7 +4559,7 @@
                 <a:ea typeface="Arial" pitchFamily="34" charset="-122"/>
                 <a:cs typeface="Arial" pitchFamily="34" charset="-120"/>
               </a:rPr>
-              <a:t>adil A/B: ajan 3, motor 2, berabere 1</a:t>
+              <a:t>iki bağımsız hakem (Claude, Gemini) aynı kazananı seçti</a:t>
             </a:r>
             <a:endParaRPr lang="en-US" sz="1250" dirty="0"/>
           </a:p>
@@ -4598,7 +4598,7 @@
                 <a:ea typeface="Arial" pitchFamily="34" charset="-122"/>
                 <a:cs typeface="Arial" pitchFamily="34" charset="-120"/>
               </a:rPr>
-              <a:t>Hakem de bir dil modeli: sonuç ajanın daha iyi olduğunu kanıtlamaz. Bu yüzden RM motorun listesini her zaman görür; ajan isteğe bağlıdır.</a:t>
+              <a:t>Kör A/B, farklı 5 soru: Haiku ajan 3, motor 1, eşit 1; Gemini ajan 4, motor 1. Az soru ve iki hakem de dil modeli: RM motorun listesini her zaman görür, ajan isteğe bağlıdır.</a:t>
             </a:r>
             <a:endParaRPr lang="en-US" sz="1200" dirty="0"/>
           </a:p>
@@ -6900,7 +6900,7 @@
                 <a:ea typeface="Arial" pitchFamily="34" charset="-122"/>
                 <a:cs typeface="Arial" pitchFamily="34" charset="-120"/>
               </a:rPr>
-              <a:t>E7 · Ajan değerlendirmesinin ayrıntısı</a:t>
+              <a:t>E7 · Ajan değerlendirmesi ve ikinci hakem</a:t>
             </a:r>
             <a:endParaRPr lang="en-US" sz="1700" dirty="0"/>
           </a:p>
@@ -15903,7 +15903,7 @@
                   </a:extLst>
                 </a:gridCol>
               </a:tblGrid>
-              <a:tr h="566928">
+              <a:tr h="530352">
                 <a:tc>
                   <a:txBody>
                     <a:bodyPr/>
@@ -16182,7 +16182,7 @@
                   </a:ext>
                 </a:extLst>
               </a:tr>
-              <a:tr h="566928">
+              <a:tr h="530352">
                 <a:tc>
                   <a:txBody>
                     <a:bodyPr/>
@@ -16461,7 +16461,7 @@
                   </a:ext>
                 </a:extLst>
               </a:tr>
-              <a:tr h="566928">
+              <a:tr h="530352">
                 <a:tc>
                   <a:txBody>
                     <a:bodyPr/>
@@ -16740,7 +16740,7 @@
                   </a:ext>
                 </a:extLst>
               </a:tr>
-              <a:tr h="566928">
+              <a:tr h="530352">
                 <a:tc>
                   <a:txBody>
                     <a:bodyPr/>
@@ -17019,7 +17019,7 @@
                   </a:ext>
                 </a:extLst>
               </a:tr>
-              <a:tr h="566928">
+              <a:tr h="530352">
                 <a:tc>
                   <a:txBody>
                     <a:bodyPr/>
@@ -17298,7 +17298,7 @@
                   </a:ext>
                 </a:extLst>
               </a:tr>
-              <a:tr h="566928">
+              <a:tr h="530352">
                 <a:tc>
                   <a:txBody>
                     <a:bodyPr/>
@@ -17577,7 +17577,7 @@
                   </a:ext>
                 </a:extLst>
               </a:tr>
-              <a:tr h="566928">
+              <a:tr h="530352">
                 <a:tc>
                   <a:txBody>
                     <a:bodyPr/>
@@ -17856,6 +17856,285 @@
                   </a:ext>
                 </a:extLst>
               </a:tr>
+              <a:tr h="530352">
+                <a:tc>
+                  <a:txBody>
+                    <a:bodyPr/>
+                    <a:lstStyle/>
+                    <a:p>
+                      <a:pPr marL="0" indent="0">
+                        <a:buNone/>
+                      </a:pPr>
+                      <a:r>
+                        <a:rPr lang="en-US" sz="1250" dirty="0">
+                          <a:solidFill>
+                            <a:srgbClr val="1C2340"/>
+                          </a:solidFill>
+                          <a:latin typeface="Arial" pitchFamily="34" charset="0"/>
+                          <a:ea typeface="Arial" pitchFamily="34" charset="-122"/>
+                          <a:cs typeface="Arial" pitchFamily="34" charset="-120"/>
+                        </a:rPr>
+                        <a:t>İkinci A/B hakemi</a:t>
+                      </a:r>
+                      <a:endParaRPr lang="en-US" sz="1250" dirty="0">
+                        <a:latin typeface="Arial" charset="0"/>
+                        <a:ea typeface="Arial" charset="0"/>
+                        <a:cs typeface="Arial" charset="0"/>
+                      </a:endParaRPr>
+                    </a:p>
+                  </a:txBody>
+                  <a:tcPr anchor="ctr">
+                    <a:lnL w="6350" cap="flat" cmpd="sng" algn="ctr">
+                      <a:solidFill>
+                        <a:srgbClr val="D0D5DD"/>
+                      </a:solidFill>
+                      <a:prstDash val="solid"/>
+                      <a:round/>
+                      <a:headEnd type="none" w="med" len="med"/>
+                      <a:tailEnd type="none" w="med" len="med"/>
+                    </a:lnL>
+                    <a:lnR w="6350" cap="flat" cmpd="sng" algn="ctr">
+                      <a:solidFill>
+                        <a:srgbClr val="D0D5DD"/>
+                      </a:solidFill>
+                      <a:prstDash val="solid"/>
+                      <a:round/>
+                      <a:headEnd type="none" w="med" len="med"/>
+                      <a:tailEnd type="none" w="med" len="med"/>
+                    </a:lnR>
+                    <a:lnT w="6350" cap="flat" cmpd="sng" algn="ctr">
+                      <a:solidFill>
+                        <a:srgbClr val="D0D5DD"/>
+                      </a:solidFill>
+                      <a:prstDash val="solid"/>
+                      <a:round/>
+                      <a:headEnd type="none" w="med" len="med"/>
+                      <a:tailEnd type="none" w="med" len="med"/>
+                    </a:lnT>
+                    <a:lnB w="6350" cap="flat" cmpd="sng" algn="ctr">
+                      <a:solidFill>
+                        <a:srgbClr val="D0D5DD"/>
+                      </a:solidFill>
+                      <a:prstDash val="solid"/>
+                      <a:round/>
+                      <a:headEnd type="none" w="med" len="med"/>
+                      <a:tailEnd type="none" w="med" len="med"/>
+                    </a:lnB>
+                    <a:solidFill>
+                      <a:srgbClr val="FFFFFF"/>
+                    </a:solidFill>
+                  </a:tcPr>
+                </a:tc>
+                <a:tc>
+                  <a:txBody>
+                    <a:bodyPr/>
+                    <a:lstStyle/>
+                    <a:p>
+                      <a:pPr marL="0" indent="0">
+                        <a:buNone/>
+                      </a:pPr>
+                      <a:r>
+                        <a:rPr lang="en-US" sz="1250" dirty="0">
+                          <a:solidFill>
+                            <a:srgbClr val="1C2340"/>
+                          </a:solidFill>
+                          <a:latin typeface="Arial" pitchFamily="34" charset="0"/>
+                          <a:ea typeface="Arial" pitchFamily="34" charset="-122"/>
+                          <a:cs typeface="Arial" pitchFamily="34" charset="-120"/>
+                        </a:rPr>
+                        <a:t>Gemini 3.8 Flash</a:t>
+                      </a:r>
+                      <a:endParaRPr lang="en-US" sz="1250" dirty="0">
+                        <a:latin typeface="Arial" charset="0"/>
+                        <a:ea typeface="Arial" charset="0"/>
+                        <a:cs typeface="Arial" charset="0"/>
+                      </a:endParaRPr>
+                    </a:p>
+                  </a:txBody>
+                  <a:tcPr anchor="ctr">
+                    <a:lnL w="6350" cap="flat" cmpd="sng" algn="ctr">
+                      <a:solidFill>
+                        <a:srgbClr val="D0D5DD"/>
+                      </a:solidFill>
+                      <a:prstDash val="solid"/>
+                      <a:round/>
+                      <a:headEnd type="none" w="med" len="med"/>
+                      <a:tailEnd type="none" w="med" len="med"/>
+                    </a:lnL>
+                    <a:lnR w="6350" cap="flat" cmpd="sng" algn="ctr">
+                      <a:solidFill>
+                        <a:srgbClr val="D0D5DD"/>
+                      </a:solidFill>
+                      <a:prstDash val="solid"/>
+                      <a:round/>
+                      <a:headEnd type="none" w="med" len="med"/>
+                      <a:tailEnd type="none" w="med" len="med"/>
+                    </a:lnR>
+                    <a:lnT w="6350" cap="flat" cmpd="sng" algn="ctr">
+                      <a:solidFill>
+                        <a:srgbClr val="D0D5DD"/>
+                      </a:solidFill>
+                      <a:prstDash val="solid"/>
+                      <a:round/>
+                      <a:headEnd type="none" w="med" len="med"/>
+                      <a:tailEnd type="none" w="med" len="med"/>
+                    </a:lnT>
+                    <a:lnB w="6350" cap="flat" cmpd="sng" algn="ctr">
+                      <a:solidFill>
+                        <a:srgbClr val="D0D5DD"/>
+                      </a:solidFill>
+                      <a:prstDash val="solid"/>
+                      <a:round/>
+                      <a:headEnd type="none" w="med" len="med"/>
+                      <a:tailEnd type="none" w="med" len="med"/>
+                    </a:lnB>
+                    <a:solidFill>
+                      <a:srgbClr val="FFFFFF"/>
+                    </a:solidFill>
+                  </a:tcPr>
+                </a:tc>
+                <a:tc>
+                  <a:txBody>
+                    <a:bodyPr/>
+                    <a:lstStyle/>
+                    <a:p>
+                      <a:pPr marL="0" indent="0">
+                        <a:buNone/>
+                      </a:pPr>
+                      <a:r>
+                        <a:rPr lang="en-US" sz="1250" dirty="0">
+                          <a:solidFill>
+                            <a:srgbClr val="1C2340"/>
+                          </a:solidFill>
+                          <a:latin typeface="Arial" pitchFamily="34" charset="0"/>
+                          <a:ea typeface="Arial" pitchFamily="34" charset="-122"/>
+                          <a:cs typeface="Arial" pitchFamily="34" charset="-120"/>
+                        </a:rPr>
+                        <a:t>ilk hakemin sorusunun birebir aynısı</a:t>
+                      </a:r>
+                      <a:endParaRPr lang="en-US" sz="1250" dirty="0">
+                        <a:latin typeface="Arial" charset="0"/>
+                        <a:ea typeface="Arial" charset="0"/>
+                        <a:cs typeface="Arial" charset="0"/>
+                      </a:endParaRPr>
+                    </a:p>
+                  </a:txBody>
+                  <a:tcPr anchor="ctr">
+                    <a:lnL w="6350" cap="flat" cmpd="sng" algn="ctr">
+                      <a:solidFill>
+                        <a:srgbClr val="D0D5DD"/>
+                      </a:solidFill>
+                      <a:prstDash val="solid"/>
+                      <a:round/>
+                      <a:headEnd type="none" w="med" len="med"/>
+                      <a:tailEnd type="none" w="med" len="med"/>
+                    </a:lnL>
+                    <a:lnR w="6350" cap="flat" cmpd="sng" algn="ctr">
+                      <a:solidFill>
+                        <a:srgbClr val="D0D5DD"/>
+                      </a:solidFill>
+                      <a:prstDash val="solid"/>
+                      <a:round/>
+                      <a:headEnd type="none" w="med" len="med"/>
+                      <a:tailEnd type="none" w="med" len="med"/>
+                    </a:lnR>
+                    <a:lnT w="6350" cap="flat" cmpd="sng" algn="ctr">
+                      <a:solidFill>
+                        <a:srgbClr val="D0D5DD"/>
+                      </a:solidFill>
+                      <a:prstDash val="solid"/>
+                      <a:round/>
+                      <a:headEnd type="none" w="med" len="med"/>
+                      <a:tailEnd type="none" w="med" len="med"/>
+                    </a:lnT>
+                    <a:lnB w="6350" cap="flat" cmpd="sng" algn="ctr">
+                      <a:solidFill>
+                        <a:srgbClr val="D0D5DD"/>
+                      </a:solidFill>
+                      <a:prstDash val="solid"/>
+                      <a:round/>
+                      <a:headEnd type="none" w="med" len="med"/>
+                      <a:tailEnd type="none" w="med" len="med"/>
+                    </a:lnB>
+                    <a:solidFill>
+                      <a:srgbClr val="FFFFFF"/>
+                    </a:solidFill>
+                  </a:tcPr>
+                </a:tc>
+                <a:tc>
+                  <a:txBody>
+                    <a:bodyPr/>
+                    <a:lstStyle/>
+                    <a:p>
+                      <a:pPr marL="0" indent="0">
+                        <a:buNone/>
+                      </a:pPr>
+                      <a:r>
+                        <a:rPr lang="en-US" sz="1250" dirty="0">
+                          <a:solidFill>
+                            <a:srgbClr val="1C2340"/>
+                          </a:solidFill>
+                          <a:latin typeface="Arial" pitchFamily="34" charset="0"/>
+                          <a:ea typeface="Arial" pitchFamily="34" charset="-122"/>
+                          <a:cs typeface="Arial" pitchFamily="34" charset="-120"/>
+                        </a:rPr>
+                        <a:t>ücretsiz katman (~0,002 $ / soru)</a:t>
+                      </a:r>
+                      <a:endParaRPr lang="en-US" sz="1250" dirty="0">
+                        <a:latin typeface="Arial" charset="0"/>
+                        <a:ea typeface="Arial" charset="0"/>
+                        <a:cs typeface="Arial" charset="0"/>
+                      </a:endParaRPr>
+                    </a:p>
+                  </a:txBody>
+                  <a:tcPr anchor="ctr">
+                    <a:lnL w="6350" cap="flat" cmpd="sng" algn="ctr">
+                      <a:solidFill>
+                        <a:srgbClr val="D0D5DD"/>
+                      </a:solidFill>
+                      <a:prstDash val="solid"/>
+                      <a:round/>
+                      <a:headEnd type="none" w="med" len="med"/>
+                      <a:tailEnd type="none" w="med" len="med"/>
+                    </a:lnL>
+                    <a:lnR w="6350" cap="flat" cmpd="sng" algn="ctr">
+                      <a:solidFill>
+                        <a:srgbClr val="D0D5DD"/>
+                      </a:solidFill>
+                      <a:prstDash val="solid"/>
+                      <a:round/>
+                      <a:headEnd type="none" w="med" len="med"/>
+                      <a:tailEnd type="none" w="med" len="med"/>
+                    </a:lnR>
+                    <a:lnT w="6350" cap="flat" cmpd="sng" algn="ctr">
+                      <a:solidFill>
+                        <a:srgbClr val="D0D5DD"/>
+                      </a:solidFill>
+                      <a:prstDash val="solid"/>
+                      <a:round/>
+                      <a:headEnd type="none" w="med" len="med"/>
+                      <a:tailEnd type="none" w="med" len="med"/>
+                    </a:lnT>
+                    <a:lnB w="6350" cap="flat" cmpd="sng" algn="ctr">
+                      <a:solidFill>
+                        <a:srgbClr val="D0D5DD"/>
+                      </a:solidFill>
+                      <a:prstDash val="solid"/>
+                      <a:round/>
+                      <a:headEnd type="none" w="med" len="med"/>
+                      <a:tailEnd type="none" w="med" len="med"/>
+                    </a:lnB>
+                    <a:solidFill>
+                      <a:srgbClr val="FFFFFF"/>
+                    </a:solidFill>
+                  </a:tcPr>
+                </a:tc>
+                <a:extLst>
+                  <a:ext uri="{0D108BD9-81ED-4DB2-BD59-A6C34878D82A}">
+                    <a16:rowId xmlns:a16="http://schemas.microsoft.com/office/drawing/2014/main" val="10007"/>
+                  </a:ext>
+                </a:extLst>
+              </a:tr>
             </a:tbl>
           </a:graphicData>
         </a:graphic>
@@ -17868,8 +18147,8 @@
         </p:nvSpPr>
         <p:spPr>
           <a:xfrm>
-            <a:off x="548640" y="5440680"/>
-            <a:ext cx="11064240" cy="548640"/>
+            <a:off x="548640" y="5715000"/>
+            <a:ext cx="11064240" cy="457200"/>
           </a:xfrm>
           <a:prstGeom prst="rect">
             <a:avLst/>
@@ -19190,8 +19469,8 @@
         </p:nvSpPr>
         <p:spPr>
           <a:xfrm>
-            <a:off x="548640" y="1280160"/>
-            <a:ext cx="11064240" cy="3931920"/>
+            <a:off x="548640" y="1188720"/>
+            <a:ext cx="6675120" cy="4114800"/>
           </a:xfrm>
           <a:prstGeom prst="rect">
             <a:avLst/>
@@ -19205,13 +19484,13 @@
           <a:p>
             <a:pPr marL="177800" indent="-177800">
               <a:spcAft>
-                <a:spcPts val="1000"/>
+                <a:spcPts val="800"/>
               </a:spcAft>
               <a:buSzPct val="100000"/>
               <a:buChar char="•"/>
             </a:pPr>
             <a:r>
-              <a:rPr lang="en-US" sz="1400" b="1" dirty="0">
+              <a:rPr lang="en-US" sz="1300" b="1" dirty="0">
                 <a:solidFill>
                   <a:srgbClr val="1C2340"/>
                 </a:solidFill>
@@ -19222,7 +19501,7 @@
               <a:t>Kurallara uyum: </a:t>
             </a:r>
             <a:r>
-              <a:rPr lang="en-US" sz="1400" dirty="0">
+              <a:rPr lang="en-US" sz="1300" dirty="0">
                 <a:solidFill>
                   <a:srgbClr val="1C2340"/>
                 </a:solidFill>
@@ -19232,18 +19511,18 @@
               </a:rPr>
               <a:t>8 kararın 8'i kod denetiminden geçti; hiçbirinde yedeğe düşülmedi.</a:t>
             </a:r>
-            <a:endParaRPr lang="en-US" sz="1400" dirty="0"/>
+            <a:endParaRPr lang="en-US" sz="1300" dirty="0"/>
           </a:p>
           <a:p>
             <a:pPr marL="177800" indent="-177800">
               <a:spcAft>
-                <a:spcPts val="1000"/>
+                <a:spcPts val="800"/>
               </a:spcAft>
               <a:buSzPct val="100000"/>
               <a:buChar char="•"/>
             </a:pPr>
             <a:r>
-              <a:rPr lang="en-US" sz="1400" b="1" dirty="0">
+              <a:rPr lang="en-US" sz="1300" b="1" dirty="0">
                 <a:solidFill>
                   <a:srgbClr val="1C2340"/>
                 </a:solidFill>
@@ -19254,7 +19533,7 @@
               <a:t>Tutarlılık: </a:t>
             </a:r>
             <a:r>
-              <a:rPr lang="en-US" sz="1400" dirty="0">
+              <a:rPr lang="en-US" sz="1300" dirty="0">
                 <a:solidFill>
                   <a:srgbClr val="1C2340"/>
                 </a:solidFill>
@@ -19264,18 +19543,18 @@
               </a:rPr>
               <a:t>kayıtlı karar aynı istek için geri gelir. Asıl test: sistemi sıfırlayıp modeli yeniden çağırdık; 8 kararın 5'i aynı, 3'ünde yalnızca bir ürün değişti (24 önerinin 21'i korundu).</a:t>
             </a:r>
-            <a:endParaRPr lang="en-US" sz="1400" dirty="0"/>
+            <a:endParaRPr lang="en-US" sz="1300" dirty="0"/>
           </a:p>
           <a:p>
             <a:pPr marL="177800" indent="-177800">
               <a:spcAft>
-                <a:spcPts val="1000"/>
+                <a:spcPts val="800"/>
               </a:spcAft>
               <a:buSzPct val="100000"/>
               <a:buChar char="•"/>
             </a:pPr>
             <a:r>
-              <a:rPr lang="en-US" sz="1400" b="1" dirty="0">
+              <a:rPr lang="en-US" sz="1300" b="1" dirty="0">
                 <a:solidFill>
                   <a:srgbClr val="1C2340"/>
                 </a:solidFill>
@@ -19286,7 +19565,7 @@
               <a:t>Kör A/B hakemi: </a:t>
             </a:r>
             <a:r>
-              <a:rPr lang="en-US" sz="1400" dirty="0">
+              <a:rPr lang="en-US" sz="1300" dirty="0">
                 <a:solidFill>
                   <a:srgbClr val="1C2340"/>
                 </a:solidFill>
@@ -19294,20 +19573,20 @@
                 <a:ea typeface="Arial" pitchFamily="34" charset="-122"/>
                 <a:cs typeface="Arial" pitchFamily="34" charset="-120"/>
               </a:rPr>
-              <a:t>yalnızca iki metni görür: "Hangisi müşteriye daha uygun ve neden?". İlk tur: ajan 5, motor 0, berabere 1.</a:t>
-            </a:r>
-            <a:endParaRPr lang="en-US" sz="1400" dirty="0"/>
+              <a:t>kimin seçtiğini bilmez; müşteri profilini ve iki ürün setinin olgularını görür: "Hangisi müşteriye daha uygun ve neden?". İlk tur: ajan 5, motor 0, eşit 1.</a:t>
+            </a:r>
+            <a:endParaRPr lang="en-US" sz="1300" dirty="0"/>
           </a:p>
           <a:p>
             <a:pPr marL="177800" indent="-177800">
               <a:spcAft>
-                <a:spcPts val="1000"/>
+                <a:spcPts val="800"/>
               </a:spcAft>
               <a:buSzPct val="100000"/>
               <a:buChar char="•"/>
             </a:pPr>
             <a:r>
-              <a:rPr lang="en-US" sz="1400" b="1" dirty="0">
+              <a:rPr lang="en-US" sz="1300" b="1" dirty="0">
                 <a:solidFill>
                   <a:srgbClr val="1C2340"/>
                 </a:solidFill>
@@ -19318,7 +19597,7 @@
               <a:t>Kendi hatamız: </a:t>
             </a:r>
             <a:r>
-              <a:rPr lang="en-US" sz="1400" dirty="0">
+              <a:rPr lang="en-US" sz="1300" dirty="0">
                 <a:solidFill>
                   <a:srgbClr val="1C2340"/>
                 </a:solidFill>
@@ -19326,20 +19605,20 @@
                 <a:ea typeface="Arial" pitchFamily="34" charset="-122"/>
                 <a:cs typeface="Arial" pitchFamily="34" charset="-120"/>
               </a:rPr>
-              <a:t>ajanın kazançlarının 3'ü P03'teydi ve motorun seçtiği IDY ile OKT ajanın aday listesinde yoktu. Aday listesi artık motorun ilk 3'üyle başlıyor; P03 yeniden: hakem iki kez de motoru seçti.</a:t>
-            </a:r>
-            <a:endParaRPr lang="en-US" sz="1400" dirty="0"/>
+              <a:t>ajanın kazançlarının 3'ü P03'teydi ve motorun seçtiği IDY ile OKT ajanın aday listesinde yoktu. Aday listesi artık motorun ilk 3'üyle başlıyor; P03 yeniden: hakem motoru seçti.</a:t>
+            </a:r>
+            <a:endParaRPr lang="en-US" sz="1300" dirty="0"/>
           </a:p>
           <a:p>
             <a:pPr marL="177800" indent="-177800">
               <a:spcAft>
-                <a:spcPts val="1000"/>
+                <a:spcPts val="800"/>
               </a:spcAft>
               <a:buSzPct val="100000"/>
               <a:buChar char="•"/>
             </a:pPr>
             <a:r>
-              <a:rPr lang="en-US" sz="1400" b="1" dirty="0">
+              <a:rPr lang="en-US" sz="1300" b="1" dirty="0">
                 <a:solidFill>
                   <a:srgbClr val="1C2340"/>
                 </a:solidFill>
@@ -19347,10 +19626,10 @@
                 <a:ea typeface="Arial" pitchFamily="34" charset="-122"/>
                 <a:cs typeface="Arial" pitchFamily="34" charset="-120"/>
               </a:rPr>
-              <a:t>Adil toplam: </a:t>
-            </a:r>
-            <a:r>
-              <a:rPr lang="en-US" sz="1400" dirty="0">
+              <a:t>İkinci hakem: </a:t>
+            </a:r>
+            <a:r>
+              <a:rPr lang="en-US" sz="1300" dirty="0">
                 <a:solidFill>
                   <a:srgbClr val="1C2340"/>
                 </a:solidFill>
@@ -19358,15 +19637,947 @@
                 <a:ea typeface="Arial" pitchFamily="34" charset="-122"/>
                 <a:cs typeface="Arial" pitchFamily="34" charset="-120"/>
               </a:rPr>
-              <a:t>ajan 3 (P01, olumsuz haber senaryosu, RM işaretleri), motor 2, berabere 1.</a:t>
-            </a:r>
-            <a:endParaRPr lang="en-US" sz="1400" dirty="0"/>
+              <a:t>aynı soruları Gemini 3.8 Flash'a da sorduk; yalnızca ilk hakemin gördüğü metinle birebir aynı sorular. Bu tekrar bir sayım hatamızı buldu: iki senaryo aynı soruyu sormuştu ve yanıtı iki kez saymıştık.</a:t>
+            </a:r>
+            <a:endParaRPr lang="en-US" sz="1300" dirty="0"/>
           </a:p>
         </p:txBody>
       </p:sp>
-      <p:sp>
-        <p:nvSpPr>
-          <p:cNvPr id="4" name="Shape 2"/>
+      <p:graphicFrame>
+        <p:nvGraphicFramePr>
+          <p:cNvPr id="21" name="Table 0"/>
+          <p:cNvGraphicFramePr>
+            <a:graphicFrameLocks noGrp="1"/>
+          </p:cNvGraphicFramePr>
+          <p:nvPr>
+            <p:extLst>
+              <p:ext uri="{D42A27DB-BD31-4B8C-83A1-F6EECF244321}">
+                <p14:modId xmlns:p14="http://schemas.microsoft.com/office/powerpoint/2010/main" val="1579011935"/>
+              </p:ext>
+            </p:extLst>
+          </p:nvPr>
+        </p:nvGraphicFramePr>
+        <p:xfrm>
+          <a:off x="7498080" y="1280160"/>
+          <a:ext cx="4114800" cy="914400"/>
+        </p:xfrm>
+        <a:graphic>
+          <a:graphicData uri="http://schemas.openxmlformats.org/drawingml/2006/table">
+            <a:tbl>
+              <a:tblPr/>
+              <a:tblGrid>
+                <a:gridCol w="1920240">
+                  <a:extLst>
+                    <a:ext uri="{9D8B030D-6E8A-4147-A177-3AD203B41FA5}">
+                      <a16:colId xmlns:a16="http://schemas.microsoft.com/office/drawing/2014/main" val="20000"/>
+                    </a:ext>
+                  </a:extLst>
+                </a:gridCol>
+                <a:gridCol w="731520">
+                  <a:extLst>
+                    <a:ext uri="{9D8B030D-6E8A-4147-A177-3AD203B41FA5}">
+                      <a16:colId xmlns:a16="http://schemas.microsoft.com/office/drawing/2014/main" val="20001"/>
+                    </a:ext>
+                  </a:extLst>
+                </a:gridCol>
+                <a:gridCol w="731520">
+                  <a:extLst>
+                    <a:ext uri="{9D8B030D-6E8A-4147-A177-3AD203B41FA5}">
+                      <a16:colId xmlns:a16="http://schemas.microsoft.com/office/drawing/2014/main" val="20002"/>
+                    </a:ext>
+                  </a:extLst>
+                </a:gridCol>
+                <a:gridCol w="731520">
+                  <a:extLst>
+                    <a:ext uri="{9D8B030D-6E8A-4147-A177-3AD203B41FA5}">
+                      <a16:colId xmlns:a16="http://schemas.microsoft.com/office/drawing/2014/main" val="20003"/>
+                    </a:ext>
+                  </a:extLst>
+                </a:gridCol>
+              </a:tblGrid>
+              <a:tr h="457200">
+                <a:tc>
+                  <a:txBody>
+                    <a:bodyPr/>
+                    <a:lstStyle/>
+                    <a:p>
+                      <a:pPr marL="0" indent="0">
+                        <a:buNone/>
+                      </a:pPr>
+                      <a:r>
+                        <a:rPr lang="en-US" sz="1300" b="1" dirty="0">
+                          <a:solidFill>
+                            <a:srgbClr val="FFFFFF"/>
+                          </a:solidFill>
+                          <a:latin typeface="Arial" pitchFamily="34" charset="0"/>
+                          <a:ea typeface="Arial" pitchFamily="34" charset="-122"/>
+                          <a:cs typeface="Arial" pitchFamily="34" charset="-120"/>
+                        </a:rPr>
+                        <a:t>Farklı 5 soru</a:t>
+                      </a:r>
+                      <a:endParaRPr lang="en-US" sz="1300" dirty="0">
+                        <a:latin typeface="Arial" charset="0"/>
+                        <a:ea typeface="Arial" charset="0"/>
+                        <a:cs typeface="Arial" charset="0"/>
+                      </a:endParaRPr>
+                    </a:p>
+                  </a:txBody>
+                  <a:tcPr anchor="ctr">
+                    <a:lnL w="6350" cap="flat" cmpd="sng" algn="ctr">
+                      <a:solidFill>
+                        <a:srgbClr val="D0D5DD"/>
+                      </a:solidFill>
+                      <a:prstDash val="solid"/>
+                      <a:round/>
+                      <a:headEnd type="none" w="med" len="med"/>
+                      <a:tailEnd type="none" w="med" len="med"/>
+                    </a:lnL>
+                    <a:lnR w="6350" cap="flat" cmpd="sng" algn="ctr">
+                      <a:solidFill>
+                        <a:srgbClr val="D0D5DD"/>
+                      </a:solidFill>
+                      <a:prstDash val="solid"/>
+                      <a:round/>
+                      <a:headEnd type="none" w="med" len="med"/>
+                      <a:tailEnd type="none" w="med" len="med"/>
+                    </a:lnR>
+                    <a:lnT w="6350" cap="flat" cmpd="sng" algn="ctr">
+                      <a:solidFill>
+                        <a:srgbClr val="D0D5DD"/>
+                      </a:solidFill>
+                      <a:prstDash val="solid"/>
+                      <a:round/>
+                      <a:headEnd type="none" w="med" len="med"/>
+                      <a:tailEnd type="none" w="med" len="med"/>
+                    </a:lnT>
+                    <a:lnB w="6350" cap="flat" cmpd="sng" algn="ctr">
+                      <a:solidFill>
+                        <a:srgbClr val="D0D5DD"/>
+                      </a:solidFill>
+                      <a:prstDash val="solid"/>
+                      <a:round/>
+                      <a:headEnd type="none" w="med" len="med"/>
+                      <a:tailEnd type="none" w="med" len="med"/>
+                    </a:lnB>
+                    <a:solidFill>
+                      <a:srgbClr val="34407A"/>
+                    </a:solidFill>
+                  </a:tcPr>
+                </a:tc>
+                <a:tc>
+                  <a:txBody>
+                    <a:bodyPr/>
+                    <a:lstStyle/>
+                    <a:p>
+                      <a:pPr marL="0" indent="0">
+                        <a:buNone/>
+                      </a:pPr>
+                      <a:r>
+                        <a:rPr lang="en-US" sz="1300" b="1" dirty="0">
+                          <a:solidFill>
+                            <a:srgbClr val="FFFFFF"/>
+                          </a:solidFill>
+                          <a:latin typeface="Arial" pitchFamily="34" charset="0"/>
+                          <a:ea typeface="Arial" pitchFamily="34" charset="-122"/>
+                          <a:cs typeface="Arial" pitchFamily="34" charset="-120"/>
+                        </a:rPr>
+                        <a:t>Ajan</a:t>
+                      </a:r>
+                      <a:endParaRPr lang="en-US" sz="1300" dirty="0">
+                        <a:latin typeface="Arial" charset="0"/>
+                        <a:ea typeface="Arial" charset="0"/>
+                        <a:cs typeface="Arial" charset="0"/>
+                      </a:endParaRPr>
+                    </a:p>
+                  </a:txBody>
+                  <a:tcPr anchor="ctr">
+                    <a:lnL w="6350" cap="flat" cmpd="sng" algn="ctr">
+                      <a:solidFill>
+                        <a:srgbClr val="D0D5DD"/>
+                      </a:solidFill>
+                      <a:prstDash val="solid"/>
+                      <a:round/>
+                      <a:headEnd type="none" w="med" len="med"/>
+                      <a:tailEnd type="none" w="med" len="med"/>
+                    </a:lnL>
+                    <a:lnR w="6350" cap="flat" cmpd="sng" algn="ctr">
+                      <a:solidFill>
+                        <a:srgbClr val="D0D5DD"/>
+                      </a:solidFill>
+                      <a:prstDash val="solid"/>
+                      <a:round/>
+                      <a:headEnd type="none" w="med" len="med"/>
+                      <a:tailEnd type="none" w="med" len="med"/>
+                    </a:lnR>
+                    <a:lnT w="6350" cap="flat" cmpd="sng" algn="ctr">
+                      <a:solidFill>
+                        <a:srgbClr val="D0D5DD"/>
+                      </a:solidFill>
+                      <a:prstDash val="solid"/>
+                      <a:round/>
+                      <a:headEnd type="none" w="med" len="med"/>
+                      <a:tailEnd type="none" w="med" len="med"/>
+                    </a:lnT>
+                    <a:lnB w="6350" cap="flat" cmpd="sng" algn="ctr">
+                      <a:solidFill>
+                        <a:srgbClr val="D0D5DD"/>
+                      </a:solidFill>
+                      <a:prstDash val="solid"/>
+                      <a:round/>
+                      <a:headEnd type="none" w="med" len="med"/>
+                      <a:tailEnd type="none" w="med" len="med"/>
+                    </a:lnB>
+                    <a:solidFill>
+                      <a:srgbClr val="34407A"/>
+                    </a:solidFill>
+                  </a:tcPr>
+                </a:tc>
+                <a:tc>
+                  <a:txBody>
+                    <a:bodyPr/>
+                    <a:lstStyle/>
+                    <a:p>
+                      <a:pPr marL="0" indent="0">
+                        <a:buNone/>
+                      </a:pPr>
+                      <a:r>
+                        <a:rPr lang="en-US" sz="1300" b="1" dirty="0">
+                          <a:solidFill>
+                            <a:srgbClr val="FFFFFF"/>
+                          </a:solidFill>
+                          <a:latin typeface="Arial" pitchFamily="34" charset="0"/>
+                          <a:ea typeface="Arial" pitchFamily="34" charset="-122"/>
+                          <a:cs typeface="Arial" pitchFamily="34" charset="-120"/>
+                        </a:rPr>
+                        <a:t>Motor</a:t>
+                      </a:r>
+                      <a:endParaRPr lang="en-US" sz="1300" dirty="0">
+                        <a:latin typeface="Arial" charset="0"/>
+                        <a:ea typeface="Arial" charset="0"/>
+                        <a:cs typeface="Arial" charset="0"/>
+                      </a:endParaRPr>
+                    </a:p>
+                  </a:txBody>
+                  <a:tcPr anchor="ctr">
+                    <a:lnL w="6350" cap="flat" cmpd="sng" algn="ctr">
+                      <a:solidFill>
+                        <a:srgbClr val="D0D5DD"/>
+                      </a:solidFill>
+                      <a:prstDash val="solid"/>
+                      <a:round/>
+                      <a:headEnd type="none" w="med" len="med"/>
+                      <a:tailEnd type="none" w="med" len="med"/>
+                    </a:lnL>
+                    <a:lnR w="6350" cap="flat" cmpd="sng" algn="ctr">
+                      <a:solidFill>
+                        <a:srgbClr val="D0D5DD"/>
+                      </a:solidFill>
+                      <a:prstDash val="solid"/>
+                      <a:round/>
+                      <a:headEnd type="none" w="med" len="med"/>
+                      <a:tailEnd type="none" w="med" len="med"/>
+                    </a:lnR>
+                    <a:lnT w="6350" cap="flat" cmpd="sng" algn="ctr">
+                      <a:solidFill>
+                        <a:srgbClr val="D0D5DD"/>
+                      </a:solidFill>
+                      <a:prstDash val="solid"/>
+                      <a:round/>
+                      <a:headEnd type="none" w="med" len="med"/>
+                      <a:tailEnd type="none" w="med" len="med"/>
+                    </a:lnT>
+                    <a:lnB w="6350" cap="flat" cmpd="sng" algn="ctr">
+                      <a:solidFill>
+                        <a:srgbClr val="D0D5DD"/>
+                      </a:solidFill>
+                      <a:prstDash val="solid"/>
+                      <a:round/>
+                      <a:headEnd type="none" w="med" len="med"/>
+                      <a:tailEnd type="none" w="med" len="med"/>
+                    </a:lnB>
+                    <a:solidFill>
+                      <a:srgbClr val="34407A"/>
+                    </a:solidFill>
+                  </a:tcPr>
+                </a:tc>
+                <a:tc>
+                  <a:txBody>
+                    <a:bodyPr/>
+                    <a:lstStyle/>
+                    <a:p>
+                      <a:pPr marL="0" indent="0">
+                        <a:buNone/>
+                      </a:pPr>
+                      <a:r>
+                        <a:rPr lang="en-US" sz="1300" b="1" dirty="0">
+                          <a:solidFill>
+                            <a:srgbClr val="FFFFFF"/>
+                          </a:solidFill>
+                          <a:latin typeface="Arial" pitchFamily="34" charset="0"/>
+                          <a:ea typeface="Arial" pitchFamily="34" charset="-122"/>
+                          <a:cs typeface="Arial" pitchFamily="34" charset="-120"/>
+                        </a:rPr>
+                        <a:t>Eşit</a:t>
+                      </a:r>
+                      <a:endParaRPr lang="en-US" sz="1300" dirty="0">
+                        <a:latin typeface="Arial" charset="0"/>
+                        <a:ea typeface="Arial" charset="0"/>
+                        <a:cs typeface="Arial" charset="0"/>
+                      </a:endParaRPr>
+                    </a:p>
+                  </a:txBody>
+                  <a:tcPr anchor="ctr">
+                    <a:lnL w="6350" cap="flat" cmpd="sng" algn="ctr">
+                      <a:solidFill>
+                        <a:srgbClr val="D0D5DD"/>
+                      </a:solidFill>
+                      <a:prstDash val="solid"/>
+                      <a:round/>
+                      <a:headEnd type="none" w="med" len="med"/>
+                      <a:tailEnd type="none" w="med" len="med"/>
+                    </a:lnL>
+                    <a:lnR w="6350" cap="flat" cmpd="sng" algn="ctr">
+                      <a:solidFill>
+                        <a:srgbClr val="D0D5DD"/>
+                      </a:solidFill>
+                      <a:prstDash val="solid"/>
+                      <a:round/>
+                      <a:headEnd type="none" w="med" len="med"/>
+                      <a:tailEnd type="none" w="med" len="med"/>
+                    </a:lnR>
+                    <a:lnT w="6350" cap="flat" cmpd="sng" algn="ctr">
+                      <a:solidFill>
+                        <a:srgbClr val="D0D5DD"/>
+                      </a:solidFill>
+                      <a:prstDash val="solid"/>
+                      <a:round/>
+                      <a:headEnd type="none" w="med" len="med"/>
+                      <a:tailEnd type="none" w="med" len="med"/>
+                    </a:lnT>
+                    <a:lnB w="6350" cap="flat" cmpd="sng" algn="ctr">
+                      <a:solidFill>
+                        <a:srgbClr val="D0D5DD"/>
+                      </a:solidFill>
+                      <a:prstDash val="solid"/>
+                      <a:round/>
+                      <a:headEnd type="none" w="med" len="med"/>
+                      <a:tailEnd type="none" w="med" len="med"/>
+                    </a:lnB>
+                    <a:solidFill>
+                      <a:srgbClr val="34407A"/>
+                    </a:solidFill>
+                  </a:tcPr>
+                </a:tc>
+                <a:extLst>
+                  <a:ext uri="{0D108BD9-81ED-4DB2-BD59-A6C34878D82A}">
+                    <a16:rowId xmlns:a16="http://schemas.microsoft.com/office/drawing/2014/main" val="10000"/>
+                  </a:ext>
+                </a:extLst>
+              </a:tr>
+              <a:tr h="457200">
+                <a:tc>
+                  <a:txBody>
+                    <a:bodyPr/>
+                    <a:lstStyle/>
+                    <a:p>
+                      <a:pPr marL="0" indent="0">
+                        <a:buNone/>
+                      </a:pPr>
+                      <a:r>
+                        <a:rPr lang="en-US" sz="1300" dirty="0">
+                          <a:solidFill>
+                            <a:srgbClr val="1C2340"/>
+                          </a:solidFill>
+                          <a:latin typeface="Arial" pitchFamily="34" charset="0"/>
+                          <a:ea typeface="Arial" pitchFamily="34" charset="-122"/>
+                          <a:cs typeface="Arial" pitchFamily="34" charset="-120"/>
+                        </a:rPr>
+                        <a:t>Claude Haiku 5.5</a:t>
+                      </a:r>
+                      <a:endParaRPr lang="en-US" sz="1300" dirty="0">
+                        <a:latin typeface="Arial" charset="0"/>
+                        <a:ea typeface="Arial" charset="0"/>
+                        <a:cs typeface="Arial" charset="0"/>
+                      </a:endParaRPr>
+                    </a:p>
+                  </a:txBody>
+                  <a:tcPr anchor="ctr">
+                    <a:lnL w="6350" cap="flat" cmpd="sng" algn="ctr">
+                      <a:solidFill>
+                        <a:srgbClr val="D0D5DD"/>
+                      </a:solidFill>
+                      <a:prstDash val="solid"/>
+                      <a:round/>
+                      <a:headEnd type="none" w="med" len="med"/>
+                      <a:tailEnd type="none" w="med" len="med"/>
+                    </a:lnL>
+                    <a:lnR w="6350" cap="flat" cmpd="sng" algn="ctr">
+                      <a:solidFill>
+                        <a:srgbClr val="D0D5DD"/>
+                      </a:solidFill>
+                      <a:prstDash val="solid"/>
+                      <a:round/>
+                      <a:headEnd type="none" w="med" len="med"/>
+                      <a:tailEnd type="none" w="med" len="med"/>
+                    </a:lnR>
+                    <a:lnT w="6350" cap="flat" cmpd="sng" algn="ctr">
+                      <a:solidFill>
+                        <a:srgbClr val="D0D5DD"/>
+                      </a:solidFill>
+                      <a:prstDash val="solid"/>
+                      <a:round/>
+                      <a:headEnd type="none" w="med" len="med"/>
+                      <a:tailEnd type="none" w="med" len="med"/>
+                    </a:lnT>
+                    <a:lnB w="6350" cap="flat" cmpd="sng" algn="ctr">
+                      <a:solidFill>
+                        <a:srgbClr val="D0D5DD"/>
+                      </a:solidFill>
+                      <a:prstDash val="solid"/>
+                      <a:round/>
+                      <a:headEnd type="none" w="med" len="med"/>
+                      <a:tailEnd type="none" w="med" len="med"/>
+                    </a:lnB>
+                    <a:solidFill>
+                      <a:srgbClr val="FFFFFF"/>
+                    </a:solidFill>
+                  </a:tcPr>
+                </a:tc>
+                <a:tc>
+                  <a:txBody>
+                    <a:bodyPr/>
+                    <a:lstStyle/>
+                    <a:p>
+                      <a:pPr marL="0" indent="0">
+                        <a:buNone/>
+                      </a:pPr>
+                      <a:r>
+                        <a:rPr lang="en-US" sz="1300" dirty="0">
+                          <a:solidFill>
+                            <a:srgbClr val="1C2340"/>
+                          </a:solidFill>
+                          <a:latin typeface="Arial" pitchFamily="34" charset="0"/>
+                          <a:ea typeface="Arial" pitchFamily="34" charset="-122"/>
+                          <a:cs typeface="Arial" pitchFamily="34" charset="-120"/>
+                        </a:rPr>
+                        <a:t>3</a:t>
+                      </a:r>
+                      <a:endParaRPr lang="en-US" sz="1300" dirty="0">
+                        <a:latin typeface="Arial" charset="0"/>
+                        <a:ea typeface="Arial" charset="0"/>
+                        <a:cs typeface="Arial" charset="0"/>
+                      </a:endParaRPr>
+                    </a:p>
+                  </a:txBody>
+                  <a:tcPr anchor="ctr">
+                    <a:lnL w="6350" cap="flat" cmpd="sng" algn="ctr">
+                      <a:solidFill>
+                        <a:srgbClr val="D0D5DD"/>
+                      </a:solidFill>
+                      <a:prstDash val="solid"/>
+                      <a:round/>
+                      <a:headEnd type="none" w="med" len="med"/>
+                      <a:tailEnd type="none" w="med" len="med"/>
+                    </a:lnL>
+                    <a:lnR w="6350" cap="flat" cmpd="sng" algn="ctr">
+                      <a:solidFill>
+                        <a:srgbClr val="D0D5DD"/>
+                      </a:solidFill>
+                      <a:prstDash val="solid"/>
+                      <a:round/>
+                      <a:headEnd type="none" w="med" len="med"/>
+                      <a:tailEnd type="none" w="med" len="med"/>
+                    </a:lnR>
+                    <a:lnT w="6350" cap="flat" cmpd="sng" algn="ctr">
+                      <a:solidFill>
+                        <a:srgbClr val="D0D5DD"/>
+                      </a:solidFill>
+                      <a:prstDash val="solid"/>
+                      <a:round/>
+                      <a:headEnd type="none" w="med" len="med"/>
+                      <a:tailEnd type="none" w="med" len="med"/>
+                    </a:lnT>
+                    <a:lnB w="6350" cap="flat" cmpd="sng" algn="ctr">
+                      <a:solidFill>
+                        <a:srgbClr val="D0D5DD"/>
+                      </a:solidFill>
+                      <a:prstDash val="solid"/>
+                      <a:round/>
+                      <a:headEnd type="none" w="med" len="med"/>
+                      <a:tailEnd type="none" w="med" len="med"/>
+                    </a:lnB>
+                    <a:solidFill>
+                      <a:srgbClr val="FFFFFF"/>
+                    </a:solidFill>
+                  </a:tcPr>
+                </a:tc>
+                <a:tc>
+                  <a:txBody>
+                    <a:bodyPr/>
+                    <a:lstStyle/>
+                    <a:p>
+                      <a:pPr marL="0" indent="0">
+                        <a:buNone/>
+                      </a:pPr>
+                      <a:r>
+                        <a:rPr lang="en-US" sz="1300" dirty="0">
+                          <a:solidFill>
+                            <a:srgbClr val="1C2340"/>
+                          </a:solidFill>
+                          <a:latin typeface="Arial" pitchFamily="34" charset="0"/>
+                          <a:ea typeface="Arial" pitchFamily="34" charset="-122"/>
+                          <a:cs typeface="Arial" pitchFamily="34" charset="-120"/>
+                        </a:rPr>
+                        <a:t>1</a:t>
+                      </a:r>
+                      <a:endParaRPr lang="en-US" sz="1300" dirty="0">
+                        <a:latin typeface="Arial" charset="0"/>
+                        <a:ea typeface="Arial" charset="0"/>
+                        <a:cs typeface="Arial" charset="0"/>
+                      </a:endParaRPr>
+                    </a:p>
+                  </a:txBody>
+                  <a:tcPr anchor="ctr">
+                    <a:lnL w="6350" cap="flat" cmpd="sng" algn="ctr">
+                      <a:solidFill>
+                        <a:srgbClr val="D0D5DD"/>
+                      </a:solidFill>
+                      <a:prstDash val="solid"/>
+                      <a:round/>
+                      <a:headEnd type="none" w="med" len="med"/>
+                      <a:tailEnd type="none" w="med" len="med"/>
+                    </a:lnL>
+                    <a:lnR w="6350" cap="flat" cmpd="sng" algn="ctr">
+                      <a:solidFill>
+                        <a:srgbClr val="D0D5DD"/>
+                      </a:solidFill>
+                      <a:prstDash val="solid"/>
+                      <a:round/>
+                      <a:headEnd type="none" w="med" len="med"/>
+                      <a:tailEnd type="none" w="med" len="med"/>
+                    </a:lnR>
+                    <a:lnT w="6350" cap="flat" cmpd="sng" algn="ctr">
+                      <a:solidFill>
+                        <a:srgbClr val="D0D5DD"/>
+                      </a:solidFill>
+                      <a:prstDash val="solid"/>
+                      <a:round/>
+                      <a:headEnd type="none" w="med" len="med"/>
+                      <a:tailEnd type="none" w="med" len="med"/>
+                    </a:lnT>
+                    <a:lnB w="6350" cap="flat" cmpd="sng" algn="ctr">
+                      <a:solidFill>
+                        <a:srgbClr val="D0D5DD"/>
+                      </a:solidFill>
+                      <a:prstDash val="solid"/>
+                      <a:round/>
+                      <a:headEnd type="none" w="med" len="med"/>
+                      <a:tailEnd type="none" w="med" len="med"/>
+                    </a:lnB>
+                    <a:solidFill>
+                      <a:srgbClr val="FFFFFF"/>
+                    </a:solidFill>
+                  </a:tcPr>
+                </a:tc>
+                <a:tc>
+                  <a:txBody>
+                    <a:bodyPr/>
+                    <a:lstStyle/>
+                    <a:p>
+                      <a:pPr marL="0" indent="0">
+                        <a:buNone/>
+                      </a:pPr>
+                      <a:r>
+                        <a:rPr lang="en-US" sz="1300" dirty="0">
+                          <a:solidFill>
+                            <a:srgbClr val="1C2340"/>
+                          </a:solidFill>
+                          <a:latin typeface="Arial" pitchFamily="34" charset="0"/>
+                          <a:ea typeface="Arial" pitchFamily="34" charset="-122"/>
+                          <a:cs typeface="Arial" pitchFamily="34" charset="-120"/>
+                        </a:rPr>
+                        <a:t>1</a:t>
+                      </a:r>
+                      <a:endParaRPr lang="en-US" sz="1300" dirty="0">
+                        <a:latin typeface="Arial" charset="0"/>
+                        <a:ea typeface="Arial" charset="0"/>
+                        <a:cs typeface="Arial" charset="0"/>
+                      </a:endParaRPr>
+                    </a:p>
+                  </a:txBody>
+                  <a:tcPr anchor="ctr">
+                    <a:lnL w="6350" cap="flat" cmpd="sng" algn="ctr">
+                      <a:solidFill>
+                        <a:srgbClr val="D0D5DD"/>
+                      </a:solidFill>
+                      <a:prstDash val="solid"/>
+                      <a:round/>
+                      <a:headEnd type="none" w="med" len="med"/>
+                      <a:tailEnd type="none" w="med" len="med"/>
+                    </a:lnL>
+                    <a:lnR w="6350" cap="flat" cmpd="sng" algn="ctr">
+                      <a:solidFill>
+                        <a:srgbClr val="D0D5DD"/>
+                      </a:solidFill>
+                      <a:prstDash val="solid"/>
+                      <a:round/>
+                      <a:headEnd type="none" w="med" len="med"/>
+                      <a:tailEnd type="none" w="med" len="med"/>
+                    </a:lnR>
+                    <a:lnT w="6350" cap="flat" cmpd="sng" algn="ctr">
+                      <a:solidFill>
+                        <a:srgbClr val="D0D5DD"/>
+                      </a:solidFill>
+                      <a:prstDash val="solid"/>
+                      <a:round/>
+                      <a:headEnd type="none" w="med" len="med"/>
+                      <a:tailEnd type="none" w="med" len="med"/>
+                    </a:lnT>
+                    <a:lnB w="6350" cap="flat" cmpd="sng" algn="ctr">
+                      <a:solidFill>
+                        <a:srgbClr val="D0D5DD"/>
+                      </a:solidFill>
+                      <a:prstDash val="solid"/>
+                      <a:round/>
+                      <a:headEnd type="none" w="med" len="med"/>
+                      <a:tailEnd type="none" w="med" len="med"/>
+                    </a:lnB>
+                    <a:solidFill>
+                      <a:srgbClr val="FFFFFF"/>
+                    </a:solidFill>
+                  </a:tcPr>
+                </a:tc>
+                <a:extLst>
+                  <a:ext uri="{0D108BD9-81ED-4DB2-BD59-A6C34878D82A}">
+                    <a16:rowId xmlns:a16="http://schemas.microsoft.com/office/drawing/2014/main" val="10001"/>
+                  </a:ext>
+                </a:extLst>
+              </a:tr>
+              <a:tr h="457200">
+                <a:tc>
+                  <a:txBody>
+                    <a:bodyPr/>
+                    <a:lstStyle/>
+                    <a:p>
+                      <a:pPr marL="0" indent="0">
+                        <a:buNone/>
+                      </a:pPr>
+                      <a:r>
+                        <a:rPr lang="en-US" sz="1300" dirty="0">
+                          <a:solidFill>
+                            <a:srgbClr val="1C2340"/>
+                          </a:solidFill>
+                          <a:latin typeface="Arial" pitchFamily="34" charset="0"/>
+                          <a:ea typeface="Arial" pitchFamily="34" charset="-122"/>
+                          <a:cs typeface="Arial" pitchFamily="34" charset="-120"/>
+                        </a:rPr>
+                        <a:t>Gemini 3.8 Flash</a:t>
+                      </a:r>
+                      <a:endParaRPr lang="en-US" sz="1300" dirty="0">
+                        <a:latin typeface="Arial" charset="0"/>
+                        <a:ea typeface="Arial" charset="0"/>
+                        <a:cs typeface="Arial" charset="0"/>
+                      </a:endParaRPr>
+                    </a:p>
+                  </a:txBody>
+                  <a:tcPr anchor="ctr">
+                    <a:lnL w="6350" cap="flat" cmpd="sng" algn="ctr">
+                      <a:solidFill>
+                        <a:srgbClr val="D0D5DD"/>
+                      </a:solidFill>
+                      <a:prstDash val="solid"/>
+                      <a:round/>
+                      <a:headEnd type="none" w="med" len="med"/>
+                      <a:tailEnd type="none" w="med" len="med"/>
+                    </a:lnL>
+                    <a:lnR w="6350" cap="flat" cmpd="sng" algn="ctr">
+                      <a:solidFill>
+                        <a:srgbClr val="D0D5DD"/>
+                      </a:solidFill>
+                      <a:prstDash val="solid"/>
+                      <a:round/>
+                      <a:headEnd type="none" w="med" len="med"/>
+                      <a:tailEnd type="none" w="med" len="med"/>
+                    </a:lnR>
+                    <a:lnT w="6350" cap="flat" cmpd="sng" algn="ctr">
+                      <a:solidFill>
+                        <a:srgbClr val="D0D5DD"/>
+                      </a:solidFill>
+                      <a:prstDash val="solid"/>
+                      <a:round/>
+                      <a:headEnd type="none" w="med" len="med"/>
+                      <a:tailEnd type="none" w="med" len="med"/>
+                    </a:lnT>
+                    <a:lnB w="6350" cap="flat" cmpd="sng" algn="ctr">
+                      <a:solidFill>
+                        <a:srgbClr val="D0D5DD"/>
+                      </a:solidFill>
+                      <a:prstDash val="solid"/>
+                      <a:round/>
+                      <a:headEnd type="none" w="med" len="med"/>
+                      <a:tailEnd type="none" w="med" len="med"/>
+                    </a:lnB>
+                    <a:solidFill>
+                      <a:srgbClr val="F1F3F7"/>
+                    </a:solidFill>
+                  </a:tcPr>
+                </a:tc>
+                <a:tc>
+                  <a:txBody>
+                    <a:bodyPr/>
+                    <a:lstStyle/>
+                    <a:p>
+                      <a:pPr marL="0" indent="0">
+                        <a:buNone/>
+                      </a:pPr>
+                      <a:r>
+                        <a:rPr lang="en-US" sz="1300" dirty="0">
+                          <a:solidFill>
+                            <a:srgbClr val="1C2340"/>
+                          </a:solidFill>
+                          <a:latin typeface="Arial" pitchFamily="34" charset="0"/>
+                          <a:ea typeface="Arial" pitchFamily="34" charset="-122"/>
+                          <a:cs typeface="Arial" pitchFamily="34" charset="-120"/>
+                        </a:rPr>
+                        <a:t>4</a:t>
+                      </a:r>
+                      <a:endParaRPr lang="en-US" sz="1300" dirty="0">
+                        <a:latin typeface="Arial" charset="0"/>
+                        <a:ea typeface="Arial" charset="0"/>
+                        <a:cs typeface="Arial" charset="0"/>
+                      </a:endParaRPr>
+                    </a:p>
+                  </a:txBody>
+                  <a:tcPr anchor="ctr">
+                    <a:lnL w="6350" cap="flat" cmpd="sng" algn="ctr">
+                      <a:solidFill>
+                        <a:srgbClr val="D0D5DD"/>
+                      </a:solidFill>
+                      <a:prstDash val="solid"/>
+                      <a:round/>
+                      <a:headEnd type="none" w="med" len="med"/>
+                      <a:tailEnd type="none" w="med" len="med"/>
+                    </a:lnL>
+                    <a:lnR w="6350" cap="flat" cmpd="sng" algn="ctr">
+                      <a:solidFill>
+                        <a:srgbClr val="D0D5DD"/>
+                      </a:solidFill>
+                      <a:prstDash val="solid"/>
+                      <a:round/>
+                      <a:headEnd type="none" w="med" len="med"/>
+                      <a:tailEnd type="none" w="med" len="med"/>
+                    </a:lnR>
+                    <a:lnT w="6350" cap="flat" cmpd="sng" algn="ctr">
+                      <a:solidFill>
+                        <a:srgbClr val="D0D5DD"/>
+                      </a:solidFill>
+                      <a:prstDash val="solid"/>
+                      <a:round/>
+                      <a:headEnd type="none" w="med" len="med"/>
+                      <a:tailEnd type="none" w="med" len="med"/>
+                    </a:lnT>
+                    <a:lnB w="6350" cap="flat" cmpd="sng" algn="ctr">
+                      <a:solidFill>
+                        <a:srgbClr val="D0D5DD"/>
+                      </a:solidFill>
+                      <a:prstDash val="solid"/>
+                      <a:round/>
+                      <a:headEnd type="none" w="med" len="med"/>
+                      <a:tailEnd type="none" w="med" len="med"/>
+                    </a:lnB>
+                    <a:solidFill>
+                      <a:srgbClr val="F1F3F7"/>
+                    </a:solidFill>
+                  </a:tcPr>
+                </a:tc>
+                <a:tc>
+                  <a:txBody>
+                    <a:bodyPr/>
+                    <a:lstStyle/>
+                    <a:p>
+                      <a:pPr marL="0" indent="0">
+                        <a:buNone/>
+                      </a:pPr>
+                      <a:r>
+                        <a:rPr lang="en-US" sz="1300" dirty="0">
+                          <a:solidFill>
+                            <a:srgbClr val="1C2340"/>
+                          </a:solidFill>
+                          <a:latin typeface="Arial" pitchFamily="34" charset="0"/>
+                          <a:ea typeface="Arial" pitchFamily="34" charset="-122"/>
+                          <a:cs typeface="Arial" pitchFamily="34" charset="-120"/>
+                        </a:rPr>
+                        <a:t>1</a:t>
+                      </a:r>
+                      <a:endParaRPr lang="en-US" sz="1300" dirty="0">
+                        <a:latin typeface="Arial" charset="0"/>
+                        <a:ea typeface="Arial" charset="0"/>
+                        <a:cs typeface="Arial" charset="0"/>
+                      </a:endParaRPr>
+                    </a:p>
+                  </a:txBody>
+                  <a:tcPr anchor="ctr">
+                    <a:lnL w="6350" cap="flat" cmpd="sng" algn="ctr">
+                      <a:solidFill>
+                        <a:srgbClr val="D0D5DD"/>
+                      </a:solidFill>
+                      <a:prstDash val="solid"/>
+                      <a:round/>
+                      <a:headEnd type="none" w="med" len="med"/>
+                      <a:tailEnd type="none" w="med" len="med"/>
+                    </a:lnL>
+                    <a:lnR w="6350" cap="flat" cmpd="sng" algn="ctr">
+                      <a:solidFill>
+                        <a:srgbClr val="D0D5DD"/>
+                      </a:solidFill>
+                      <a:prstDash val="solid"/>
+                      <a:round/>
+                      <a:headEnd type="none" w="med" len="med"/>
+                      <a:tailEnd type="none" w="med" len="med"/>
+                    </a:lnR>
+                    <a:lnT w="6350" cap="flat" cmpd="sng" algn="ctr">
+                      <a:solidFill>
+                        <a:srgbClr val="D0D5DD"/>
+                      </a:solidFill>
+                      <a:prstDash val="solid"/>
+                      <a:round/>
+                      <a:headEnd type="none" w="med" len="med"/>
+                      <a:tailEnd type="none" w="med" len="med"/>
+                    </a:lnT>
+                    <a:lnB w="6350" cap="flat" cmpd="sng" algn="ctr">
+                      <a:solidFill>
+                        <a:srgbClr val="D0D5DD"/>
+                      </a:solidFill>
+                      <a:prstDash val="solid"/>
+                      <a:round/>
+                      <a:headEnd type="none" w="med" len="med"/>
+                      <a:tailEnd type="none" w="med" len="med"/>
+                    </a:lnB>
+                    <a:solidFill>
+                      <a:srgbClr val="F1F3F7"/>
+                    </a:solidFill>
+                  </a:tcPr>
+                </a:tc>
+                <a:tc>
+                  <a:txBody>
+                    <a:bodyPr/>
+                    <a:lstStyle/>
+                    <a:p>
+                      <a:pPr marL="0" indent="0">
+                        <a:buNone/>
+                      </a:pPr>
+                      <a:r>
+                        <a:rPr lang="en-US" sz="1300" dirty="0">
+                          <a:solidFill>
+                            <a:srgbClr val="1C2340"/>
+                          </a:solidFill>
+                          <a:latin typeface="Arial" pitchFamily="34" charset="0"/>
+                          <a:ea typeface="Arial" pitchFamily="34" charset="-122"/>
+                          <a:cs typeface="Arial" pitchFamily="34" charset="-120"/>
+                        </a:rPr>
+                        <a:t>0</a:t>
+                      </a:r>
+                      <a:endParaRPr lang="en-US" sz="1300" dirty="0">
+                        <a:latin typeface="Arial" charset="0"/>
+                        <a:ea typeface="Arial" charset="0"/>
+                        <a:cs typeface="Arial" charset="0"/>
+                      </a:endParaRPr>
+                    </a:p>
+                  </a:txBody>
+                  <a:tcPr anchor="ctr">
+                    <a:lnL w="6350" cap="flat" cmpd="sng" algn="ctr">
+                      <a:solidFill>
+                        <a:srgbClr val="D0D5DD"/>
+                      </a:solidFill>
+                      <a:prstDash val="solid"/>
+                      <a:round/>
+                      <a:headEnd type="none" w="med" len="med"/>
+                      <a:tailEnd type="none" w="med" len="med"/>
+                    </a:lnL>
+                    <a:lnR w="6350" cap="flat" cmpd="sng" algn="ctr">
+                      <a:solidFill>
+                        <a:srgbClr val="D0D5DD"/>
+                      </a:solidFill>
+                      <a:prstDash val="solid"/>
+                      <a:round/>
+                      <a:headEnd type="none" w="med" len="med"/>
+                      <a:tailEnd type="none" w="med" len="med"/>
+                    </a:lnR>
+                    <a:lnT w="6350" cap="flat" cmpd="sng" algn="ctr">
+                      <a:solidFill>
+                        <a:srgbClr val="D0D5DD"/>
+                      </a:solidFill>
+                      <a:prstDash val="solid"/>
+                      <a:round/>
+                      <a:headEnd type="none" w="med" len="med"/>
+                      <a:tailEnd type="none" w="med" len="med"/>
+                    </a:lnT>
+                    <a:lnB w="6350" cap="flat" cmpd="sng" algn="ctr">
+                      <a:solidFill>
+                        <a:srgbClr val="D0D5DD"/>
+                      </a:solidFill>
+                      <a:prstDash val="solid"/>
+                      <a:round/>
+                      <a:headEnd type="none" w="med" len="med"/>
+                      <a:tailEnd type="none" w="med" len="med"/>
+                    </a:lnB>
+                    <a:solidFill>
+                      <a:srgbClr val="F1F3F7"/>
+                    </a:solidFill>
+                  </a:tcPr>
+                </a:tc>
+                <a:extLst>
+                  <a:ext uri="{0D108BD9-81ED-4DB2-BD59-A6C34878D82A}">
+                    <a16:rowId xmlns:a16="http://schemas.microsoft.com/office/drawing/2014/main" val="10002"/>
+                  </a:ext>
+                </a:extLst>
+              </a:tr>
+            </a:tbl>
+          </a:graphicData>
+        </a:graphic>
+      </p:graphicFrame>
+      <p:sp>
+        <p:nvSpPr>
+          <p:cNvPr id="5" name="Text 2"/>
+          <p:cNvSpPr txBox="1"/>
+          <p:nvPr/>
+        </p:nvSpPr>
+        <p:spPr>
+          <a:xfrm>
+            <a:off x="7498080" y="2880360"/>
+            <a:ext cx="4114800" cy="822960"/>
+          </a:xfrm>
+          <a:prstGeom prst="rect">
+            <a:avLst/>
+          </a:prstGeom>
+          <a:noFill/>
+          <a:ln/>
+        </p:spPr>
+        <p:txBody>
+          <a:bodyPr wrap="square" lIns="0" tIns="0" rIns="0" bIns="0" rtlCol="0" anchor="t"/>
+          <a:lstStyle/>
+          <a:p>
+            <a:pPr marL="0" indent="0">
+              <a:buNone/>
+            </a:pPr>
+            <a:r>
+              <a:rPr lang="en-US" sz="1250" dirty="0">
+                <a:solidFill>
+                  <a:srgbClr val="475569"/>
+                </a:solidFill>
+                <a:latin typeface="Arial" pitchFamily="34" charset="0"/>
+                <a:ea typeface="Arial" pitchFamily="34" charset="-122"/>
+                <a:cs typeface="Arial" pitchFamily="34" charset="-120"/>
+              </a:rPr>
+              <a:t>İki hakem 5 sorunun 4'ünde aynı kazananı seçti; P05'te Haiku "eşit", Gemini ajan dedi.</a:t>
+            </a:r>
+            <a:endParaRPr lang="en-US" sz="1250" dirty="0"/>
+          </a:p>
+        </p:txBody>
+      </p:sp>
+      <p:sp>
+        <p:nvSpPr>
+          <p:cNvPr id="6" name="Shape 3"/>
           <p:cNvSpPr/>
           <p:nvPr/>
         </p:nvSpPr>
@@ -19388,7 +20599,7 @@
       </p:sp>
       <p:sp>
         <p:nvSpPr>
-          <p:cNvPr id="5" name="Text 3"/>
+          <p:cNvPr id="7" name="Text 4"/>
           <p:cNvSpPr txBox="1"/>
           <p:nvPr/>
         </p:nvSpPr>
@@ -19430,7 +20641,7 @@
                 <a:ea typeface="Arial" pitchFamily="34" charset="-122"/>
                 <a:cs typeface="Arial" pitchFamily="34" charset="-120"/>
               </a:rPr>
-              <a:t>hakem de bir dil modeli; sonuç ajanın daha iyi olduğunu göstermez. RM önce motorun önerilerini görür, ajanı isterse çalıştırır ve iki listeyi yan yana karşılaştırır.</a:t>
+              <a:t>soru sayısı az ve iki hakem de dil modeli; sonuç ajanın daha iyi olduğunu kanıtlamaz. RM önce motorun önerilerini görür, ajanı isterse çalıştırır ve iki listeyi yan yana karşılaştırır.</a:t>
             </a:r>
             <a:endParaRPr lang="en-US" sz="1350" dirty="0"/>
           </a:p>

--- a/docs/teslim/sunum/07-sunum.pptx
+++ b/docs/teslim/sunum/07-sunum.pptx
@@ -129,13 +129,13 @@
   <p:extLst>
     <p:ext uri="{521415D9-36F7-43E2-AB2F-B90AF26B5E84}">
       <p14:sectionLst xmlns:p14="http://schemas.microsoft.com/office/powerpoint/2010/main">
-        <p14:section name="Giriş" id="{4A2E5428-A46E-40EB-B989-DA3B31041646}">
+        <p14:section name="Giriş" id="{8679D8CC-7BCC-997D-0891-7020282C9FB9}">
           <p14:sldIdLst>
             <p14:sldId id="256"/>
             <p14:sldId id="257"/>
           </p14:sldIdLst>
         </p14:section>
-        <p14:section name="Çözüm" id="{12B2ACB8-1E91-36B8-54C6-C494DCCED272}">
+        <p14:section name="Çözüm" id="{668CA352-57B2-2184-E759-ADAD23962CF2}">
           <p14:sldIdLst>
             <p14:sldId id="258"/>
             <p14:sldId id="259"/>
@@ -145,19 +145,19 @@
             <p14:sldId id="263"/>
           </p14:sldIdLst>
         </p14:section>
-        <p14:section name="Demo" id="{32C1499C-E3E6-6A5D-BD2D-2D0ABA33C5F6}">
+        <p14:section name="Demo" id="{168643CC-9698-679A-8E64-F375157EAAD7}">
           <p14:sldIdLst>
             <p14:sldId id="264"/>
           </p14:sldIdLst>
         </p14:section>
-        <p14:section name="Sonuçlar" id="{A677FB6F-1487-890E-8CDC-380550958D48}">
+        <p14:section name="Sonuçlar" id="{27E9C16C-DEEA-52BD-979C-617774EBB711}">
           <p14:sldIdLst>
             <p14:sldId id="265"/>
             <p14:sldId id="266"/>
             <p14:sldId id="267"/>
           </p14:sldIdLst>
         </p14:section>
-        <p14:section name="Ek" id="{F1811340-79BE-A369-38D8-0CB8AFEE9BEF}">
+        <p14:section name="Ek" id="{B4836AC6-44F6-73B5-EDAA-4B18D70AF4E4}">
           <p14:sldIdLst>
             <p14:sldId id="268"/>
             <p14:sldId id="269"/>
@@ -206,7 +206,7 @@
     </p:spTree>
     <p:extLst>
       <p:ext uri="{BB962C8B-B14F-4D97-AF65-F5344CB8AC3E}">
-        <p14:creationId xmlns:p14="http://schemas.microsoft.com/office/powerpoint/2010/main" val="3265325785"/>
+        <p14:creationId xmlns:p14="http://schemas.microsoft.com/office/powerpoint/2010/main" val="596010215"/>
       </p:ext>
     </p:extLst>
   </p:cSld>
@@ -4129,7 +4129,7 @@
                 <a:ea typeface="Arial" pitchFamily="34" charset="-122"/>
                 <a:cs typeface="Arial" pitchFamily="34" charset="-120"/>
               </a:rPr>
-              <a:t>3.078 pytest, 458 web testi; ağ yok, sahte model</a:t>
+              <a:t>3.082 pytest, 458 web testi; ağ yok, sahte model</a:t>
             </a:r>
             <a:endParaRPr lang="en-US" sz="1250" dirty="0"/>
           </a:p>
@@ -5852,7 +5852,7 @@
                 <a:ea typeface="Arial" pitchFamily="34" charset="-122"/>
                 <a:cs typeface="Arial" pitchFamily="34" charset="-120"/>
               </a:rPr>
-              <a:t>"kurallar %100" yeterli değil. Çıktılar arası karşılaştırma ve canlı kontrol gerekir. Tüm liste: docs/found-and-fixed.md (20 kayıt).</a:t>
+              <a:t>"kurallar %100" yeterli değil. Çıktılar arası karşılaştırma ve canlı kontrol gerekir. Tüm liste: docs/found-and-fixed.md (22 kayıt).</a:t>
             </a:r>
             <a:endParaRPr lang="en-US" sz="1250" dirty="0"/>
           </a:p>
@@ -21949,7 +21949,7 @@
                           <a:ea typeface="Arial" pitchFamily="34" charset="-122"/>
                           <a:cs typeface="Arial" pitchFamily="34" charset="-120"/>
                         </a:rPr>
-                        <a:t>Tarama kurucu adını da okuyordu</a:t>
+                        <a:t>Tarama kurucu adını da okuyordu; ücretli yeniden ölçüm ikinci biçimi buldu ("Garanti GZP")</a:t>
                       </a:r>
                       <a:endParaRPr lang="en-US" sz="1200" dirty="0">
                         <a:latin typeface="Arial" charset="0"/>
@@ -22017,7 +22017,7 @@
                           <a:ea typeface="Arial" pitchFamily="34" charset="-122"/>
                           <a:cs typeface="Arial" pitchFamily="34" charset="-120"/>
                         </a:rPr>
-                        <a:t>Kurucu adı taramadan çıkarıldı; yasak ifadenin kendisi hâlâ yakalanır</a:t>
+                        <a:t>Kurucu adı ve fon kodu taramadan çıkarıldı; ölçüm 3/3; tek başına "garanti" hâlâ yakalanır</a:t>
                       </a:r>
                       <a:endParaRPr lang="en-US" sz="1200" dirty="0">
                         <a:latin typeface="Arial" charset="0"/>
